--- a/3d5d20dTarget_InteractionFeature_PromptAenderung.pptx
+++ b/3d5d20dTarget_InteractionFeature_PromptAenderung.pptx
@@ -5434,6 +5434,12 @@
         <p:txBody>
           <a:bodyPr/>
           <a:lstStyle/>
+          <a:p>
+            <a:r>
+              <a:rPr lang="en-AT" b="1" dirty="0"/>
+              <a:t>Progress Report</a:t>
+            </a:r>
+          </a:p>
           <a:p>
             <a:r>
               <a:rPr lang="en-AT" dirty="0"/>
